--- a/public/pitch/MyFlove_Pitchdeck_4.0.pptx
+++ b/public/pitch/MyFlove_Pitchdeck_4.0.pptx
@@ -6253,7 +6253,7 @@
         <p:spPr>
           <a:xfrm>
             <a:off x="731520" y="880000"/>
-            <a:ext cx="10698480" cy="552450"/>
+            <a:ext cx="10698480" cy="438150"/>
           </a:xfrm>
           <a:prstGeom prst="rect">
             <a:avLst/>
@@ -6268,7 +6268,7 @@
           <a:p>
             <a:pPr algn="l"/>
             <a:r>
-              <a:rPr sz="2900" b="1" i="0">
+              <a:rPr sz="2300" b="1" i="0">
                 <a:solidFill>
                   <a:srgbClr val="241C3B"/>
                 </a:solidFill>
@@ -6287,7 +6287,7 @@
         </p:nvSpPr>
         <p:spPr>
           <a:xfrm>
-            <a:off x="731520" y="1560000"/>
+            <a:off x="731520" y="1550000"/>
             <a:ext cx="9949586" cy="266700"/>
           </a:xfrm>
           <a:prstGeom prst="rect">
@@ -9611,7 +9611,7 @@
         <p:spPr>
           <a:xfrm>
             <a:off x="731520" y="880000"/>
-            <a:ext cx="10698480" cy="552450"/>
+            <a:ext cx="10698480" cy="476250"/>
           </a:xfrm>
           <a:prstGeom prst="rect">
             <a:avLst/>
@@ -9626,7 +9626,7 @@
           <a:p>
             <a:pPr algn="l"/>
             <a:r>
-              <a:rPr sz="2900" b="1" i="0">
+              <a:rPr sz="2500" b="1" i="0">
                 <a:solidFill>
                   <a:srgbClr val="241C3B"/>
                 </a:solidFill>
@@ -9645,7 +9645,7 @@
         </p:nvSpPr>
         <p:spPr>
           <a:xfrm>
-            <a:off x="731520" y="1560000"/>
+            <a:off x="731520" y="1550000"/>
             <a:ext cx="9949586" cy="266700"/>
           </a:xfrm>
           <a:prstGeom prst="rect">
@@ -15237,7 +15237,7 @@
         <p:spPr>
           <a:xfrm>
             <a:off x="731520" y="880000"/>
-            <a:ext cx="10698480" cy="552450"/>
+            <a:ext cx="10698480" cy="438150"/>
           </a:xfrm>
           <a:prstGeom prst="rect">
             <a:avLst/>
@@ -15252,7 +15252,7 @@
           <a:p>
             <a:pPr algn="l"/>
             <a:r>
-              <a:rPr sz="2900" b="1" i="0">
+              <a:rPr sz="2300" b="1" i="0">
                 <a:solidFill>
                   <a:srgbClr val="241C3B"/>
                 </a:solidFill>
@@ -15271,7 +15271,7 @@
         </p:nvSpPr>
         <p:spPr>
           <a:xfrm>
-            <a:off x="731520" y="1560000"/>
+            <a:off x="731520" y="1550000"/>
             <a:ext cx="9949586" cy="266700"/>
           </a:xfrm>
           <a:prstGeom prst="rect">
